--- a/CorpLaw/4. Corporate Personality and Attributes II.pptx
+++ b/CorpLaw/4. Corporate Personality and Attributes II.pptx
@@ -261,7 +261,7 @@
           <a:p>
             <a:fld id="{7E62B2E0-41D4-4BD0-8F27-233CF851A423}" type="datetimeFigureOut">
               <a:rPr lang="en-US" smtClean="0"/>
-              <a:t>9/14/2025</a:t>
+              <a:t>2/21/2026</a:t>
             </a:fld>
             <a:endParaRPr lang="en-US" dirty="0"/>
           </a:p>
@@ -6367,6 +6367,13 @@
             <a:schemeClr val="lt1"/>
           </a:fontRef>
         </p:style>
+        <p:txBody>
+          <a:bodyPr/>
+          <a:lstStyle/>
+          <a:p>
+            <a:endParaRPr lang="en-SG"/>
+          </a:p>
+        </p:txBody>
       </p:sp>
       <p:sp>
         <p:nvSpPr>
@@ -6559,7 +6566,7 @@
           <a:p>
             <a:fld id="{BC9AB8A9-18BE-4EDF-90DD-E48A588FE9E1}" type="datetime1">
               <a:rPr lang="en-US" smtClean="0"/>
-              <a:t>9/14/2025</a:t>
+              <a:t>2/21/2026</a:t>
             </a:fld>
             <a:endParaRPr lang="en-US" dirty="0"/>
           </a:p>
@@ -6821,7 +6828,7 @@
           <a:p>
             <a:fld id="{31C11933-86B0-441A-B639-BD29FDFEFE70}" type="datetime1">
               <a:rPr lang="en-US" smtClean="0"/>
-              <a:t>9/14/2025</a:t>
+              <a:t>2/21/2026</a:t>
             </a:fld>
             <a:endParaRPr lang="en-US" dirty="0"/>
           </a:p>
@@ -7056,7 +7063,7 @@
           <a:p>
             <a:fld id="{74662F02-AFBF-41E7-AC4B-D00C212D7A74}" type="datetime1">
               <a:rPr lang="en-US" smtClean="0"/>
-              <a:t>9/14/2025</a:t>
+              <a:t>2/21/2026</a:t>
             </a:fld>
             <a:endParaRPr lang="en-US" dirty="0"/>
           </a:p>
@@ -7296,7 +7303,7 @@
           <a:p>
             <a:fld id="{5F466308-2A9A-43A3-8189-DAED754C8691}" type="datetime1">
               <a:rPr lang="en-US" smtClean="0"/>
-              <a:t>9/14/2025</a:t>
+              <a:t>2/21/2026</a:t>
             </a:fld>
             <a:endParaRPr lang="en-US" dirty="0"/>
           </a:p>
@@ -7603,7 +7610,7 @@
           <a:p>
             <a:fld id="{FC51178D-1D9D-49FF-BA4D-77D5F3F2ABE7}" type="datetime1">
               <a:rPr lang="en-US" smtClean="0"/>
-              <a:t>9/14/2025</a:t>
+              <a:t>2/21/2026</a:t>
             </a:fld>
             <a:endParaRPr lang="en-US" dirty="0"/>
           </a:p>
@@ -7905,7 +7912,7 @@
           <a:p>
             <a:fld id="{84A73D5F-7352-4D75-84BB-BEEE96694360}" type="datetime1">
               <a:rPr lang="en-US" smtClean="0"/>
-              <a:t>9/14/2025</a:t>
+              <a:t>2/21/2026</a:t>
             </a:fld>
             <a:endParaRPr lang="en-US" dirty="0"/>
           </a:p>
@@ -8327,7 +8334,7 @@
           <a:p>
             <a:fld id="{73AEC2FA-EF00-4A47-8C60-11D9B66273AB}" type="datetime1">
               <a:rPr lang="en-US" smtClean="0"/>
-              <a:t>9/14/2025</a:t>
+              <a:t>2/21/2026</a:t>
             </a:fld>
             <a:endParaRPr lang="en-US" dirty="0"/>
           </a:p>
@@ -8489,7 +8496,7 @@
           <a:p>
             <a:fld id="{69C03762-E4E4-41FB-87AC-4875A8A25370}" type="datetime1">
               <a:rPr lang="en-US" smtClean="0"/>
-              <a:t>9/14/2025</a:t>
+              <a:t>2/21/2026</a:t>
             </a:fld>
             <a:endParaRPr lang="en-US" dirty="0"/>
           </a:p>
@@ -8584,7 +8591,7 @@
           <a:p>
             <a:fld id="{663153EE-997E-48D6-BC05-B28D307B015C}" type="datetime1">
               <a:rPr lang="en-US" smtClean="0"/>
-              <a:t>9/14/2025</a:t>
+              <a:t>2/21/2026</a:t>
             </a:fld>
             <a:endParaRPr lang="en-US" dirty="0"/>
           </a:p>
@@ -8962,7 +8969,7 @@
           <a:p>
             <a:fld id="{E67CB83A-8CDA-4EB5-9F88-80628B7C644C}" type="datetime1">
               <a:rPr lang="en-US" smtClean="0"/>
-              <a:t>9/14/2025</a:t>
+              <a:t>2/21/2026</a:t>
             </a:fld>
             <a:endParaRPr lang="en-US" dirty="0"/>
           </a:p>
@@ -9250,7 +9257,7 @@
           <a:p>
             <a:fld id="{22FEB533-51F5-4A09-A69B-BDA5FA92A366}" type="datetime1">
               <a:rPr lang="en-US" smtClean="0"/>
-              <a:t>9/14/2025</a:t>
+              <a:t>2/21/2026</a:t>
             </a:fld>
             <a:endParaRPr lang="en-US" dirty="0"/>
           </a:p>
@@ -9461,7 +9468,7 @@
           <a:p>
             <a:fld id="{64819377-49A4-4FAF-9376-1B9935A96765}" type="datetime1">
               <a:rPr lang="en-US" smtClean="0"/>
-              <a:t>9/14/2025</a:t>
+              <a:t>2/21/2026</a:t>
             </a:fld>
             <a:endParaRPr lang="en-US" dirty="0"/>
           </a:p>
@@ -9577,6 +9584,13 @@
             <a:schemeClr val="lt1"/>
           </a:fontRef>
         </p:style>
+        <p:txBody>
+          <a:bodyPr/>
+          <a:lstStyle/>
+          <a:p>
+            <a:endParaRPr lang="en-SG"/>
+          </a:p>
+        </p:txBody>
       </p:sp>
       <p:sp>
         <p:nvSpPr>
@@ -9614,6 +9628,13 @@
             <a:schemeClr val="lt1"/>
           </a:fontRef>
         </p:style>
+        <p:txBody>
+          <a:bodyPr/>
+          <a:lstStyle/>
+          <a:p>
+            <a:endParaRPr lang="en-SG"/>
+          </a:p>
+        </p:txBody>
       </p:sp>
       <p:sp>
         <p:nvSpPr>
@@ -9651,6 +9672,13 @@
             <a:schemeClr val="lt1"/>
           </a:fontRef>
         </p:style>
+        <p:txBody>
+          <a:bodyPr/>
+          <a:lstStyle/>
+          <a:p>
+            <a:endParaRPr lang="en-SG"/>
+          </a:p>
+        </p:txBody>
       </p:sp>
     </p:spTree>
     <p:extLst>
@@ -16262,11 +16290,15 @@
             </a:r>
             <a:r>
               <a:rPr lang="en-US" b="1" i="1" dirty="0"/>
-              <a:t>non exhaustive</a:t>
-            </a:r>
-            <a:r>
-              <a:rPr lang="en-US" dirty="0"/>
-              <a:t>)</a:t>
+              <a:t>non </a:t>
+            </a:r>
+            <a:r>
+              <a:rPr lang="en-US" b="1" i="1"/>
+              <a:t>exhaustive</a:t>
+            </a:r>
+            <a:r>
+              <a:rPr lang="en-US"/>
+              <a:t>).</a:t>
             </a:r>
             <a:endParaRPr lang="en-US" b="1" i="1" u="sng" dirty="0"/>
           </a:p>
